--- a/slides/ARC3133_Class11.pptx
+++ b/slides/ARC3133_Class11.pptx
@@ -3567,7 +3567,7 @@
                 </a:solidFill>
                 <a:latin typeface="Arial"/>
               </a:rPr>
-              <a:t>P4a CHECKPOINT</a:t>
+              <a:t>P3d DUE · P4a CHECKPOINT</a:t>
             </a:r>
           </a:p>
         </p:txBody>
@@ -3602,7 +3602,7 @@
                 </a:solidFill>
                 <a:latin typeface="Arial"/>
               </a:rPr>
-              <a:t>VOLUMETRIC DATA AND FIELDS</a:t>
+              <a:t>P3d DUE TODAY  /  P4a CHECKPOINT TODAY</a:t>
             </a:r>
           </a:p>
         </p:txBody>
@@ -3742,7 +3742,7 @@
                 </a:solidFill>
                 <a:latin typeface="Calibri"/>
               </a:rPr>
-              <a:t>Rest of the class: the checkpoint first — items 1, 2 and 5 — then keep building.</a:t>
+              <a:t>P3d is handed in today. Then the P4a checkpoint — items 1, 2 and 5 — then keep building.</a:t>
             </a:r>
           </a:p>
         </p:txBody>
